--- a/exports/pptx/lessons/primary-module-09-subtraction-nikhilam/day-02-hugs-to-ten.pptx
+++ b/exports/pptx/lessons/primary-module-09-subtraction-nikhilam/day-02-hugs-to-ten.pptx
@@ -15,9 +15,12 @@
     <p:sldId id="263" r:id="rId9"/>
     <p:sldId id="264" r:id="rId10"/>
     <p:sldId id="265" r:id="rId11"/>
+    <p:sldId id="266" r:id="rId12"/>
+    <p:sldId id="267" r:id="rId13"/>
+    <p:sldId id="268" r:id="rId14"/>
   </p:sldIdLst>
   <p:notesMasterIdLst>
-    <p:notesMasterId r:id="rId12"/>
+    <p:notesMasterId r:id="rId15"/>
   </p:notesMasterIdLst>
   <p:sldSz cx="9144000" cy="5143500"/>
   <p:notesSz cx="5143500" cy="9144000"/>
@@ -623,6 +626,270 @@
             <a:fld id="{F7021451-1387-4CA6-816F-3879F97B5CBC}" type="slidenum">
               <a:rPr lang="en-US"/>
               <a:t>10</a:t>
+            </a:fld>
+            <a:endParaRPr lang="en-US"/>
+          </a:p>
+        </p:txBody>
+      </p:sp>
+    </p:spTree>
+    <p:extLst>
+      <p:ext uri="{BB962C8B-B14F-4D97-AF65-F5344CB8AC3E}">
+        <p14:creationId xmlns:p14="http://schemas.microsoft.com/office/powerpoint/2010/main" val="1024086991"/>
+      </p:ext>
+    </p:extLst>
+  </p:cSld>
+  <p:clrMapOvr>
+    <a:masterClrMapping/>
+  </p:clrMapOvr>
+</p:notes>
+</file>
+
+<file path=ppt/notesSlides/notesSlide11.xml><?xml version="1.0" encoding="utf-8"?>
+<p:notes xmlns:a="http://schemas.openxmlformats.org/drawingml/2006/main" xmlns:r="http://schemas.openxmlformats.org/officeDocument/2006/relationships" xmlns:p="http://schemas.openxmlformats.org/presentationml/2006/main">
+  <p:cSld>
+    <p:spTree>
+      <p:nvGrpSpPr>
+        <p:cNvPr id="1" name=""/>
+        <p:cNvGrpSpPr/>
+        <p:nvPr/>
+      </p:nvGrpSpPr>
+      <p:grpSpPr>
+        <a:xfrm>
+          <a:off x="0" y="0"/>
+          <a:ext cx="0" cy="0"/>
+          <a:chOff x="0" y="0"/>
+          <a:chExt cx="0" cy="0"/>
+        </a:xfrm>
+      </p:grpSpPr>
+      <p:sp>
+        <p:nvSpPr>
+          <p:cNvPr id="2" name="Slide Image Placeholder 1"/>
+          <p:cNvSpPr>
+            <a:spLocks noGrp="1" noRot="1" noChangeAspect="1"/>
+          </p:cNvSpPr>
+          <p:nvPr>
+            <p:ph type="sldImg"/>
+          </p:nvPr>
+        </p:nvSpPr>
+        <p:spPr/>
+      </p:sp>
+      <p:sp>
+        <p:nvSpPr>
+          <p:cNvPr id="3" name="Notes Placeholder 2"/>
+          <p:cNvSpPr>
+            <a:spLocks noGrp="1"/>
+          </p:cNvSpPr>
+          <p:nvPr>
+            <p:ph type="body" idx="1"/>
+          </p:nvPr>
+        </p:nvSpPr>
+        <p:spPr/>
+        <p:txBody>
+          <a:bodyPr/>
+          <a:lstStyle/>
+          <a:p>
+            <a:r>
+              <a:rPr lang="en-US" dirty="0"/>
+              <a:t/>
+            </a:r>
+            <a:endParaRPr lang="en-US" dirty="0"/>
+          </a:p>
+        </p:txBody>
+      </p:sp>
+      <p:sp>
+        <p:nvSpPr>
+          <p:cNvPr id="4" name="Slide Number Placeholder 3"/>
+          <p:cNvSpPr>
+            <a:spLocks noGrp="1"/>
+          </p:cNvSpPr>
+          <p:nvPr>
+            <p:ph type="sldNum" sz="quarter" idx="10"/>
+          </p:nvPr>
+        </p:nvSpPr>
+        <p:spPr/>
+        <p:txBody>
+          <a:bodyPr/>
+          <a:lstStyle/>
+          <a:p>
+            <a:fld id="{F7021451-1387-4CA6-816F-3879F97B5CBC}" type="slidenum">
+              <a:rPr lang="en-US"/>
+              <a:t>11</a:t>
+            </a:fld>
+            <a:endParaRPr lang="en-US"/>
+          </a:p>
+        </p:txBody>
+      </p:sp>
+    </p:spTree>
+    <p:extLst>
+      <p:ext uri="{BB962C8B-B14F-4D97-AF65-F5344CB8AC3E}">
+        <p14:creationId xmlns:p14="http://schemas.microsoft.com/office/powerpoint/2010/main" val="1024086991"/>
+      </p:ext>
+    </p:extLst>
+  </p:cSld>
+  <p:clrMapOvr>
+    <a:masterClrMapping/>
+  </p:clrMapOvr>
+</p:notes>
+</file>
+
+<file path=ppt/notesSlides/notesSlide12.xml><?xml version="1.0" encoding="utf-8"?>
+<p:notes xmlns:a="http://schemas.openxmlformats.org/drawingml/2006/main" xmlns:r="http://schemas.openxmlformats.org/officeDocument/2006/relationships" xmlns:p="http://schemas.openxmlformats.org/presentationml/2006/main">
+  <p:cSld>
+    <p:spTree>
+      <p:nvGrpSpPr>
+        <p:cNvPr id="1" name=""/>
+        <p:cNvGrpSpPr/>
+        <p:nvPr/>
+      </p:nvGrpSpPr>
+      <p:grpSpPr>
+        <a:xfrm>
+          <a:off x="0" y="0"/>
+          <a:ext cx="0" cy="0"/>
+          <a:chOff x="0" y="0"/>
+          <a:chExt cx="0" cy="0"/>
+        </a:xfrm>
+      </p:grpSpPr>
+      <p:sp>
+        <p:nvSpPr>
+          <p:cNvPr id="2" name="Slide Image Placeholder 1"/>
+          <p:cNvSpPr>
+            <a:spLocks noGrp="1" noRot="1" noChangeAspect="1"/>
+          </p:cNvSpPr>
+          <p:nvPr>
+            <p:ph type="sldImg"/>
+          </p:nvPr>
+        </p:nvSpPr>
+        <p:spPr/>
+      </p:sp>
+      <p:sp>
+        <p:nvSpPr>
+          <p:cNvPr id="3" name="Notes Placeholder 2"/>
+          <p:cNvSpPr>
+            <a:spLocks noGrp="1"/>
+          </p:cNvSpPr>
+          <p:nvPr>
+            <p:ph type="body" idx="1"/>
+          </p:nvPr>
+        </p:nvSpPr>
+        <p:spPr/>
+        <p:txBody>
+          <a:bodyPr/>
+          <a:lstStyle/>
+          <a:p>
+            <a:r>
+              <a:rPr lang="en-US" dirty="0"/>
+              <a:t/>
+            </a:r>
+            <a:endParaRPr lang="en-US" dirty="0"/>
+          </a:p>
+        </p:txBody>
+      </p:sp>
+      <p:sp>
+        <p:nvSpPr>
+          <p:cNvPr id="4" name="Slide Number Placeholder 3"/>
+          <p:cNvSpPr>
+            <a:spLocks noGrp="1"/>
+          </p:cNvSpPr>
+          <p:nvPr>
+            <p:ph type="sldNum" sz="quarter" idx="10"/>
+          </p:nvPr>
+        </p:nvSpPr>
+        <p:spPr/>
+        <p:txBody>
+          <a:bodyPr/>
+          <a:lstStyle/>
+          <a:p>
+            <a:fld id="{F7021451-1387-4CA6-816F-3879F97B5CBC}" type="slidenum">
+              <a:rPr lang="en-US"/>
+              <a:t>12</a:t>
+            </a:fld>
+            <a:endParaRPr lang="en-US"/>
+          </a:p>
+        </p:txBody>
+      </p:sp>
+    </p:spTree>
+    <p:extLst>
+      <p:ext uri="{BB962C8B-B14F-4D97-AF65-F5344CB8AC3E}">
+        <p14:creationId xmlns:p14="http://schemas.microsoft.com/office/powerpoint/2010/main" val="1024086991"/>
+      </p:ext>
+    </p:extLst>
+  </p:cSld>
+  <p:clrMapOvr>
+    <a:masterClrMapping/>
+  </p:clrMapOvr>
+</p:notes>
+</file>
+
+<file path=ppt/notesSlides/notesSlide13.xml><?xml version="1.0" encoding="utf-8"?>
+<p:notes xmlns:a="http://schemas.openxmlformats.org/drawingml/2006/main" xmlns:r="http://schemas.openxmlformats.org/officeDocument/2006/relationships" xmlns:p="http://schemas.openxmlformats.org/presentationml/2006/main">
+  <p:cSld>
+    <p:spTree>
+      <p:nvGrpSpPr>
+        <p:cNvPr id="1" name=""/>
+        <p:cNvGrpSpPr/>
+        <p:nvPr/>
+      </p:nvGrpSpPr>
+      <p:grpSpPr>
+        <a:xfrm>
+          <a:off x="0" y="0"/>
+          <a:ext cx="0" cy="0"/>
+          <a:chOff x="0" y="0"/>
+          <a:chExt cx="0" cy="0"/>
+        </a:xfrm>
+      </p:grpSpPr>
+      <p:sp>
+        <p:nvSpPr>
+          <p:cNvPr id="2" name="Slide Image Placeholder 1"/>
+          <p:cNvSpPr>
+            <a:spLocks noGrp="1" noRot="1" noChangeAspect="1"/>
+          </p:cNvSpPr>
+          <p:nvPr>
+            <p:ph type="sldImg"/>
+          </p:nvPr>
+        </p:nvSpPr>
+        <p:spPr/>
+      </p:sp>
+      <p:sp>
+        <p:nvSpPr>
+          <p:cNvPr id="3" name="Notes Placeholder 2"/>
+          <p:cNvSpPr>
+            <a:spLocks noGrp="1"/>
+          </p:cNvSpPr>
+          <p:nvPr>
+            <p:ph type="body" idx="1"/>
+          </p:nvPr>
+        </p:nvSpPr>
+        <p:spPr/>
+        <p:txBody>
+          <a:bodyPr/>
+          <a:lstStyle/>
+          <a:p>
+            <a:r>
+              <a:rPr lang="en-US" dirty="0"/>
+              <a:t/>
+            </a:r>
+            <a:endParaRPr lang="en-US" dirty="0"/>
+          </a:p>
+        </p:txBody>
+      </p:sp>
+      <p:sp>
+        <p:nvSpPr>
+          <p:cNvPr id="4" name="Slide Number Placeholder 3"/>
+          <p:cNvSpPr>
+            <a:spLocks noGrp="1"/>
+          </p:cNvSpPr>
+          <p:nvPr>
+            <p:ph type="sldNum" sz="quarter" idx="10"/>
+          </p:nvPr>
+        </p:nvSpPr>
+        <p:spPr/>
+        <p:txBody>
+          <a:bodyPr/>
+          <a:lstStyle/>
+          <a:p>
+            <a:fld id="{F7021451-1387-4CA6-816F-3879F97B5CBC}" type="slidenum">
+              <a:rPr lang="en-US"/>
+              <a:t>13</a:t>
             </a:fld>
             <a:endParaRPr lang="en-US"/>
           </a:p>
@@ -1876,102 +2143,6 @@
         </p:nvSpPr>
         <p:spPr>
           <a:xfrm>
-            <a:off x="406301" y="1223963"/>
-            <a:ext cx="8498026" cy="274290"/>
-          </a:xfrm>
-          <a:prstGeom prst="rect">
-            <a:avLst/>
-          </a:prstGeom>
-          <a:noFill/>
-          <a:ln/>
-        </p:spPr>
-        <p:txBody>
-          <a:bodyPr wrap="square" lIns="0" tIns="0" rIns="0" bIns="0" rtlCol="0" anchor="t"/>
-          <a:lstStyle/>
-          <a:p>
-            <a:pPr algn="l" indent="0" marL="0">
-              <a:lnSpc>
-                <a:spcPts val="2160"/>
-              </a:lnSpc>
-              <a:spcBef>
-                <a:spcPts val="600"/>
-              </a:spcBef>
-              <a:spcAft>
-                <a:spcPts val="800"/>
-              </a:spcAft>
-              <a:buNone/>
-            </a:pPr>
-            <a:r>
-              <a:rPr lang="en-US" sz="1800" b="1" dirty="0">
-                <a:solidFill>
-                  <a:srgbClr val="E07A5F"/>
-                </a:solidFill>
-                <a:latin typeface="Georgia" pitchFamily="34" charset="0"/>
-                <a:ea typeface="Georgia" pitchFamily="34" charset="-122"/>
-                <a:cs typeface="Georgia" pitchFamily="34" charset="-120"/>
-              </a:rPr>
-              <a:t>Goal</a:t>
-            </a:r>
-            <a:endParaRPr lang="en-US" sz="1800" dirty="0"/>
-          </a:p>
-        </p:txBody>
-      </p:sp>
-      <p:sp>
-        <p:nvSpPr>
-          <p:cNvPr id="6" name="Text 4"/>
-          <p:cNvSpPr/>
-          <p:nvPr/>
-        </p:nvSpPr>
-        <p:spPr>
-          <a:xfrm>
-            <a:off x="406301" y="1637854"/>
-            <a:ext cx="8498026" cy="213271"/>
-          </a:xfrm>
-          <a:prstGeom prst="rect">
-            <a:avLst/>
-          </a:prstGeom>
-          <a:noFill/>
-          <a:ln/>
-        </p:spPr>
-        <p:txBody>
-          <a:bodyPr wrap="square" lIns="0" tIns="0" rIns="0" bIns="0" rtlCol="0" anchor="t"/>
-          <a:lstStyle/>
-          <a:p>
-            <a:pPr algn="l" indent="0" marL="0">
-              <a:lnSpc>
-                <a:spcPts val="1680"/>
-              </a:lnSpc>
-              <a:spcBef>
-                <a:spcPts val="300"/>
-              </a:spcBef>
-              <a:spcAft>
-                <a:spcPts val="300"/>
-              </a:spcAft>
-              <a:buNone/>
-            </a:pPr>
-            <a:r>
-              <a:rPr lang="en-US" sz="1200" dirty="0">
-                <a:solidFill>
-                  <a:srgbClr val="2C2C2C"/>
-                </a:solidFill>
-                <a:latin typeface="Verdana" pitchFamily="34" charset="0"/>
-                <a:ea typeface="Verdana" pitchFamily="34" charset="-122"/>
-                <a:cs typeface="Verdana" pitchFamily="34" charset="-120"/>
-              </a:rPr>
-              <a:t>Children practise friend recall in a paired drill until every child can name a friend in under 2 seconds.</a:t>
-            </a:r>
-            <a:endParaRPr lang="en-US" sz="1200" dirty="0"/>
-          </a:p>
-        </p:txBody>
-      </p:sp>
-      <p:sp>
-        <p:nvSpPr>
-          <p:cNvPr id="7" name="Text 5"/>
-          <p:cNvSpPr/>
-          <p:nvPr/>
-        </p:nvSpPr>
-        <p:spPr>
-          <a:xfrm>
             <a:off x="406301" y="4434929"/>
             <a:ext cx="8498026" cy="213271"/>
           </a:xfrm>
@@ -2116,7 +2287,7 @@
                 <a:ea typeface="Georgia" pitchFamily="34" charset="-122"/>
                 <a:cs typeface="Georgia" pitchFamily="34" charset="-120"/>
               </a:rPr>
-              <a:t>Teacher's quick notes</a:t>
+              <a:t>Wrap-up (7 min)</a:t>
             </a:r>
             <a:endParaRPr lang="en-US" sz="1800" dirty="0"/>
           </a:p>
@@ -2130,8 +2301,8 @@
         </p:nvSpPr>
         <p:spPr>
           <a:xfrm>
-            <a:off x="406301" y="870942"/>
-            <a:ext cx="8498026" cy="639812"/>
+            <a:off x="634901" y="883593"/>
+            <a:ext cx="8102798" cy="769441"/>
           </a:xfrm>
           <a:prstGeom prst="rect">
             <a:avLst/>
@@ -2143,17 +2314,15 @@
           <a:bodyPr wrap="square" lIns="0" tIns="0" rIns="0" bIns="0" rtlCol="0" anchor="t"/>
           <a:lstStyle/>
           <a:p>
-            <a:pPr algn="l" indent="0" marL="0">
-              <a:lnSpc>
-                <a:spcPts val="1680"/>
-              </a:lnSpc>
-              <a:spcBef>
-                <a:spcPts val="300"/>
-              </a:spcBef>
-              <a:spcAft>
-                <a:spcPts val="300"/>
-              </a:spcAft>
-              <a:buNone/>
+            <a:pPr algn="l" marL="342900" indent="-342900">
+              <a:lnSpc>
+                <a:spcPts val="1620"/>
+              </a:lnSpc>
+              <a:spcAft>
+                <a:spcPts val="300"/>
+              </a:spcAft>
+              <a:buSzPct val="100000"/>
+              <a:buChar char="•"/>
             </a:pPr>
             <a:r>
               <a:rPr lang="en-US" sz="1200" dirty="0">
@@ -2164,7 +2333,779 @@
                 <a:ea typeface="Verdana" pitchFamily="34" charset="-122"/>
                 <a:cs typeface="Verdana" pitchFamily="34" charset="-120"/>
               </a:rPr>
-              <a:t>– The HUG metaphor is sticky for this age group. Hold it. – Some children laugh at "5 and 5 are best friends." Let them. The laugh helps the math stick. – Avoid timed competition between pairs publicly. Each pair races itself.</a:t>
+              <a:t>Quick chorus: teacher calls a digit; class chorus the friend. Do 15 in 60 seconds.</a:t>
+            </a:r>
+            <a:endParaRPr lang="en-US" sz="1200" dirty="0"/>
+          </a:p>
+          <a:p>
+            <a:pPr algn="l" marL="342900" indent="-342900">
+              <a:lnSpc>
+                <a:spcPts val="1620"/>
+              </a:lnSpc>
+              <a:spcAft>
+                <a:spcPts val="300"/>
+              </a:spcAft>
+              <a:buSzPct val="100000"/>
+              <a:buChar char="•"/>
+            </a:pPr>
+            <a:r>
+              <a:rPr lang="en-US" sz="1200" dirty="0">
+                <a:solidFill>
+                  <a:srgbClr val="2C2C2C"/>
+                </a:solidFill>
+                <a:latin typeface="Verdana" pitchFamily="34" charset="0"/>
+                <a:ea typeface="Verdana" pitchFamily="34" charset="-122"/>
+                <a:cs typeface="Verdana" pitchFamily="34" charset="-120"/>
+              </a:rPr>
+              <a:t>4 → SIX! 8 → TWO! 1 → NINE! 6 → FOUR! 2 → EIGHT! 5 → FIVE! ...</a:t>
+            </a:r>
+            <a:endParaRPr lang="en-US" sz="1200" dirty="0"/>
+          </a:p>
+          <a:p>
+            <a:pPr algn="l" marL="342900" indent="-342900">
+              <a:lnSpc>
+                <a:spcPts val="1620"/>
+              </a:lnSpc>
+              <a:spcAft>
+                <a:spcPts val="300"/>
+              </a:spcAft>
+              <a:buSzPct val="100000"/>
+              <a:buChar char="•"/>
+            </a:pPr>
+            <a:r>
+              <a:rPr lang="en-US" sz="1200" dirty="0">
+                <a:solidFill>
+                  <a:srgbClr val="2C2C2C"/>
+                </a:solidFill>
+                <a:latin typeface="Verdana" pitchFamily="34" charset="0"/>
+                <a:ea typeface="Verdana" pitchFamily="34" charset="-122"/>
+                <a:cs typeface="Verdana" pitchFamily="34" charset="-120"/>
+              </a:rPr>
+              <a:t>Daily chant.</a:t>
+            </a:r>
+            <a:endParaRPr lang="en-US" sz="1200" dirty="0"/>
+          </a:p>
+        </p:txBody>
+      </p:sp>
+      <p:sp>
+        <p:nvSpPr>
+          <p:cNvPr id="5" name="Text 3"/>
+          <p:cNvSpPr/>
+          <p:nvPr/>
+        </p:nvSpPr>
+        <p:spPr>
+          <a:xfrm>
+            <a:off x="406301" y="4434929"/>
+            <a:ext cx="8498026" cy="213271"/>
+          </a:xfrm>
+          <a:prstGeom prst="rect">
+            <a:avLst/>
+          </a:prstGeom>
+          <a:noFill/>
+          <a:ln/>
+        </p:spPr>
+        <p:txBody>
+          <a:bodyPr wrap="square" lIns="0" tIns="0" rIns="0" bIns="0" rtlCol="0" anchor="t"/>
+          <a:lstStyle/>
+          <a:p>
+            <a:pPr algn="l" indent="0" marL="0">
+              <a:lnSpc>
+                <a:spcPts val="1680"/>
+              </a:lnSpc>
+              <a:spcBef>
+                <a:spcPts val="300"/>
+              </a:spcBef>
+              <a:spcAft>
+                <a:spcPts val="300"/>
+              </a:spcAft>
+              <a:buNone/>
+            </a:pPr>
+            <a:r>
+              <a:rPr lang="en-US" sz="1200" dirty="0">
+                <a:solidFill>
+                  <a:srgbClr val="2C2C2C"/>
+                </a:solidFill>
+                <a:latin typeface="Verdana" pitchFamily="34" charset="0"/>
+                <a:ea typeface="Verdana" pitchFamily="34" charset="-122"/>
+                <a:cs typeface="Verdana" pitchFamily="34" charset="-120"/>
+              </a:rPr>
+              <a:t>Primary ·  · IKS Curriculum</a:t>
+            </a:r>
+            <a:endParaRPr lang="en-US" sz="1200" dirty="0"/>
+          </a:p>
+        </p:txBody>
+      </p:sp>
+    </p:spTree>
+  </p:cSld>
+  <p:clrMapOvr>
+    <a:masterClrMapping/>
+  </p:clrMapOvr>
+</p:sld>
+</file>
+
+<file path=ppt/slides/slide11.xml><?xml version="1.0" encoding="utf-8"?>
+<p:sld xmlns:a="http://schemas.openxmlformats.org/drawingml/2006/main" xmlns:r="http://schemas.openxmlformats.org/officeDocument/2006/relationships" xmlns:p="http://schemas.openxmlformats.org/presentationml/2006/main">
+  <p:cSld name="Slide 11">
+    <p:bg>
+      <p:bgPr>
+        <a:solidFill>
+          <a:srgbClr val="FAF7F2"/>
+        </a:solidFill>
+      </p:bgPr>
+    </p:bg>
+    <p:spTree>
+      <p:nvGrpSpPr>
+        <p:cNvPr id="1" name=""/>
+        <p:cNvGrpSpPr/>
+        <p:nvPr/>
+      </p:nvGrpSpPr>
+      <p:grpSpPr>
+        <a:xfrm>
+          <a:off x="0" y="0"/>
+          <a:ext cx="0" cy="0"/>
+          <a:chOff x="0" y="0"/>
+          <a:chExt cx="0" cy="0"/>
+        </a:xfrm>
+      </p:grpSpPr>
+      <p:sp>
+        <p:nvSpPr>
+          <p:cNvPr id="2" name="Text 0"/>
+          <p:cNvSpPr/>
+          <p:nvPr/>
+        </p:nvSpPr>
+        <p:spPr>
+          <a:xfrm>
+            <a:off x="0" y="0"/>
+            <a:ext cx="9144000" cy="101501"/>
+          </a:xfrm>
+          <a:prstGeom prst="rect">
+            <a:avLst/>
+          </a:prstGeom>
+          <a:solidFill>
+            <a:srgbClr val="87A96B"/>
+          </a:solidFill>
+          <a:ln/>
+        </p:spPr>
+        <p:txBody>
+          <a:bodyPr wrap="square" rtlCol="0" anchor="ctr"/>
+          <a:lstStyle/>
+          <a:p>
+            <a:pPr indent="0" marL="0">
+              <a:buNone/>
+            </a:pPr>
+            <a:endParaRPr lang="en-US" dirty="0"/>
+          </a:p>
+        </p:txBody>
+      </p:sp>
+      <p:sp>
+        <p:nvSpPr>
+          <p:cNvPr id="3" name="Text 1"/>
+          <p:cNvSpPr/>
+          <p:nvPr/>
+        </p:nvSpPr>
+        <p:spPr>
+          <a:xfrm>
+            <a:off x="406301" y="457051"/>
+            <a:ext cx="8498026" cy="274290"/>
+          </a:xfrm>
+          <a:prstGeom prst="rect">
+            <a:avLst/>
+          </a:prstGeom>
+          <a:noFill/>
+          <a:ln/>
+        </p:spPr>
+        <p:txBody>
+          <a:bodyPr wrap="square" lIns="0" tIns="0" rIns="0" bIns="0" rtlCol="0" anchor="t"/>
+          <a:lstStyle/>
+          <a:p>
+            <a:pPr algn="l" indent="0" marL="0">
+              <a:lnSpc>
+                <a:spcPts val="2160"/>
+              </a:lnSpc>
+              <a:spcBef>
+                <a:spcPts val="600"/>
+              </a:spcBef>
+              <a:spcAft>
+                <a:spcPts val="800"/>
+              </a:spcAft>
+              <a:buNone/>
+            </a:pPr>
+            <a:r>
+              <a:rPr lang="en-US" sz="1800" b="1" dirty="0">
+                <a:solidFill>
+                  <a:srgbClr val="E07A5F"/>
+                </a:solidFill>
+                <a:latin typeface="Georgia" pitchFamily="34" charset="0"/>
+                <a:ea typeface="Georgia" pitchFamily="34" charset="-122"/>
+                <a:cs typeface="Georgia" pitchFamily="34" charset="-120"/>
+              </a:rPr>
+              <a:t>Homework / take-home</a:t>
+            </a:r>
+            <a:endParaRPr lang="en-US" sz="1800" dirty="0"/>
+          </a:p>
+        </p:txBody>
+      </p:sp>
+      <p:sp>
+        <p:nvSpPr>
+          <p:cNvPr id="4" name="Text 2"/>
+          <p:cNvSpPr/>
+          <p:nvPr/>
+        </p:nvSpPr>
+        <p:spPr>
+          <a:xfrm>
+            <a:off x="634901" y="883593"/>
+            <a:ext cx="8102798" cy="281880"/>
+          </a:xfrm>
+          <a:prstGeom prst="rect">
+            <a:avLst/>
+          </a:prstGeom>
+          <a:noFill/>
+          <a:ln/>
+        </p:spPr>
+        <p:txBody>
+          <a:bodyPr wrap="square" lIns="0" tIns="0" rIns="0" bIns="0" rtlCol="0" anchor="t"/>
+          <a:lstStyle/>
+          <a:p>
+            <a:pPr algn="l" marL="342900" indent="-342900">
+              <a:lnSpc>
+                <a:spcPts val="1620"/>
+              </a:lnSpc>
+              <a:spcAft>
+                <a:spcPts val="300"/>
+              </a:spcAft>
+              <a:buSzPct val="100000"/>
+              <a:buChar char="•"/>
+            </a:pPr>
+            <a:r>
+              <a:rPr lang="en-US" sz="1200" dirty="0">
+                <a:solidFill>
+                  <a:srgbClr val="2C2C2C"/>
+                </a:solidFill>
+                <a:latin typeface="Verdana" pitchFamily="34" charset="0"/>
+                <a:ea typeface="Verdana" pitchFamily="34" charset="-122"/>
+                <a:cs typeface="Verdana" pitchFamily="34" charset="-120"/>
+              </a:rPr>
+              <a:t>Friend drill with family: 20 digits in 60 seconds. Track how many you got.</a:t>
+            </a:r>
+            <a:endParaRPr lang="en-US" sz="1200" dirty="0"/>
+          </a:p>
+        </p:txBody>
+      </p:sp>
+      <p:sp>
+        <p:nvSpPr>
+          <p:cNvPr id="5" name="Text 3"/>
+          <p:cNvSpPr/>
+          <p:nvPr/>
+        </p:nvSpPr>
+        <p:spPr>
+          <a:xfrm>
+            <a:off x="406301" y="4434929"/>
+            <a:ext cx="8498026" cy="213271"/>
+          </a:xfrm>
+          <a:prstGeom prst="rect">
+            <a:avLst/>
+          </a:prstGeom>
+          <a:noFill/>
+          <a:ln/>
+        </p:spPr>
+        <p:txBody>
+          <a:bodyPr wrap="square" lIns="0" tIns="0" rIns="0" bIns="0" rtlCol="0" anchor="t"/>
+          <a:lstStyle/>
+          <a:p>
+            <a:pPr algn="l" indent="0" marL="0">
+              <a:lnSpc>
+                <a:spcPts val="1680"/>
+              </a:lnSpc>
+              <a:spcBef>
+                <a:spcPts val="300"/>
+              </a:spcBef>
+              <a:spcAft>
+                <a:spcPts val="300"/>
+              </a:spcAft>
+              <a:buNone/>
+            </a:pPr>
+            <a:r>
+              <a:rPr lang="en-US" sz="1200" dirty="0">
+                <a:solidFill>
+                  <a:srgbClr val="2C2C2C"/>
+                </a:solidFill>
+                <a:latin typeface="Verdana" pitchFamily="34" charset="0"/>
+                <a:ea typeface="Verdana" pitchFamily="34" charset="-122"/>
+                <a:cs typeface="Verdana" pitchFamily="34" charset="-120"/>
+              </a:rPr>
+              <a:t>Primary ·  · IKS Curriculum</a:t>
+            </a:r>
+            <a:endParaRPr lang="en-US" sz="1200" dirty="0"/>
+          </a:p>
+        </p:txBody>
+      </p:sp>
+    </p:spTree>
+  </p:cSld>
+  <p:clrMapOvr>
+    <a:masterClrMapping/>
+  </p:clrMapOvr>
+</p:sld>
+</file>
+
+<file path=ppt/slides/slide12.xml><?xml version="1.0" encoding="utf-8"?>
+<p:sld xmlns:a="http://schemas.openxmlformats.org/drawingml/2006/main" xmlns:r="http://schemas.openxmlformats.org/officeDocument/2006/relationships" xmlns:p="http://schemas.openxmlformats.org/presentationml/2006/main">
+  <p:cSld name="Slide 12">
+    <p:bg>
+      <p:bgPr>
+        <a:solidFill>
+          <a:srgbClr val="FAF7F2"/>
+        </a:solidFill>
+      </p:bgPr>
+    </p:bg>
+    <p:spTree>
+      <p:nvGrpSpPr>
+        <p:cNvPr id="1" name=""/>
+        <p:cNvGrpSpPr/>
+        <p:nvPr/>
+      </p:nvGrpSpPr>
+      <p:grpSpPr>
+        <a:xfrm>
+          <a:off x="0" y="0"/>
+          <a:ext cx="0" cy="0"/>
+          <a:chOff x="0" y="0"/>
+          <a:chExt cx="0" cy="0"/>
+        </a:xfrm>
+      </p:grpSpPr>
+      <p:sp>
+        <p:nvSpPr>
+          <p:cNvPr id="2" name="Text 0"/>
+          <p:cNvSpPr/>
+          <p:nvPr/>
+        </p:nvSpPr>
+        <p:spPr>
+          <a:xfrm>
+            <a:off x="0" y="0"/>
+            <a:ext cx="9144000" cy="101501"/>
+          </a:xfrm>
+          <a:prstGeom prst="rect">
+            <a:avLst/>
+          </a:prstGeom>
+          <a:solidFill>
+            <a:srgbClr val="87A96B"/>
+          </a:solidFill>
+          <a:ln/>
+        </p:spPr>
+        <p:txBody>
+          <a:bodyPr wrap="square" rtlCol="0" anchor="ctr"/>
+          <a:lstStyle/>
+          <a:p>
+            <a:pPr indent="0" marL="0">
+              <a:buNone/>
+            </a:pPr>
+            <a:endParaRPr lang="en-US" dirty="0"/>
+          </a:p>
+        </p:txBody>
+      </p:sp>
+      <p:sp>
+        <p:nvSpPr>
+          <p:cNvPr id="3" name="Text 1"/>
+          <p:cNvSpPr/>
+          <p:nvPr/>
+        </p:nvSpPr>
+        <p:spPr>
+          <a:xfrm>
+            <a:off x="406301" y="457051"/>
+            <a:ext cx="8498026" cy="274290"/>
+          </a:xfrm>
+          <a:prstGeom prst="rect">
+            <a:avLst/>
+          </a:prstGeom>
+          <a:noFill/>
+          <a:ln/>
+        </p:spPr>
+        <p:txBody>
+          <a:bodyPr wrap="square" lIns="0" tIns="0" rIns="0" bIns="0" rtlCol="0" anchor="t"/>
+          <a:lstStyle/>
+          <a:p>
+            <a:pPr algn="l" indent="0" marL="0">
+              <a:lnSpc>
+                <a:spcPts val="2160"/>
+              </a:lnSpc>
+              <a:spcBef>
+                <a:spcPts val="600"/>
+              </a:spcBef>
+              <a:spcAft>
+                <a:spcPts val="800"/>
+              </a:spcAft>
+              <a:buNone/>
+            </a:pPr>
+            <a:r>
+              <a:rPr lang="en-US" sz="1800" b="1" dirty="0">
+                <a:solidFill>
+                  <a:srgbClr val="E07A5F"/>
+                </a:solidFill>
+                <a:latin typeface="Georgia" pitchFamily="34" charset="0"/>
+                <a:ea typeface="Georgia" pitchFamily="34" charset="-122"/>
+                <a:cs typeface="Georgia" pitchFamily="34" charset="-120"/>
+              </a:rPr>
+              <a:t>Differentiation</a:t>
+            </a:r>
+            <a:endParaRPr lang="en-US" sz="1800" dirty="0"/>
+          </a:p>
+        </p:txBody>
+      </p:sp>
+      <p:sp>
+        <p:nvSpPr>
+          <p:cNvPr id="4" name="Text 2"/>
+          <p:cNvSpPr/>
+          <p:nvPr/>
+        </p:nvSpPr>
+        <p:spPr>
+          <a:xfrm>
+            <a:off x="634901" y="883593"/>
+            <a:ext cx="8102798" cy="525661"/>
+          </a:xfrm>
+          <a:prstGeom prst="rect">
+            <a:avLst/>
+          </a:prstGeom>
+          <a:noFill/>
+          <a:ln/>
+        </p:spPr>
+        <p:txBody>
+          <a:bodyPr wrap="square" lIns="0" tIns="0" rIns="0" bIns="0" rtlCol="0" anchor="t"/>
+          <a:lstStyle/>
+          <a:p>
+            <a:pPr algn="l" marL="342900" indent="-342900">
+              <a:lnSpc>
+                <a:spcPts val="1620"/>
+              </a:lnSpc>
+              <a:spcAft>
+                <a:spcPts val="300"/>
+              </a:spcAft>
+              <a:buSzPct val="100000"/>
+              <a:buChar char="•"/>
+            </a:pPr>
+            <a:r>
+              <a:rPr lang="en-US" sz="1200" b="1" dirty="0">
+                <a:solidFill>
+                  <a:srgbClr val="2C2C2C"/>
+                </a:solidFill>
+                <a:latin typeface="Verdana" pitchFamily="34" charset="0"/>
+                <a:ea typeface="Verdana" pitchFamily="34" charset="-122"/>
+                <a:cs typeface="Verdana" pitchFamily="34" charset="-120"/>
+              </a:rPr>
+              <a:t>Tier up:</a:t>
+            </a:r>
+            <a:pPr algn="l" indent="0" marL="0">
+              <a:lnSpc>
+                <a:spcPts val="1620"/>
+              </a:lnSpc>
+              <a:spcAft>
+                <a:spcPts val="300"/>
+              </a:spcAft>
+              <a:buNone/>
+            </a:pPr>
+            <a:r>
+              <a:rPr lang="en-US" sz="1200" dirty="0">
+                <a:solidFill>
+                  <a:srgbClr val="2C2C2C"/>
+                </a:solidFill>
+                <a:latin typeface="Verdana" pitchFamily="34" charset="0"/>
+                <a:ea typeface="Verdana" pitchFamily="34" charset="-122"/>
+                <a:cs typeface="Verdana" pitchFamily="34" charset="-120"/>
+              </a:rPr>
+              <a:t> "Friends to 100" preview: who completes 73? (27.) Show the friend on bar paper.</a:t>
+            </a:r>
+            <a:endParaRPr lang="en-US" sz="1200" dirty="0"/>
+          </a:p>
+          <a:p>
+            <a:pPr algn="l" marL="342900" indent="-342900">
+              <a:lnSpc>
+                <a:spcPts val="1620"/>
+              </a:lnSpc>
+              <a:spcAft>
+                <a:spcPts val="300"/>
+              </a:spcAft>
+              <a:buSzPct val="100000"/>
+              <a:buChar char="•"/>
+            </a:pPr>
+            <a:r>
+              <a:rPr lang="en-US" sz="1200" b="1" dirty="0">
+                <a:solidFill>
+                  <a:srgbClr val="2C2C2C"/>
+                </a:solidFill>
+                <a:latin typeface="Verdana" pitchFamily="34" charset="0"/>
+                <a:ea typeface="Verdana" pitchFamily="34" charset="-122"/>
+                <a:cs typeface="Verdana" pitchFamily="34" charset="-120"/>
+              </a:rPr>
+              <a:t>Tier down:</a:t>
+            </a:r>
+            <a:pPr algn="l" indent="0" marL="0">
+              <a:lnSpc>
+                <a:spcPts val="1620"/>
+              </a:lnSpc>
+              <a:spcAft>
+                <a:spcPts val="300"/>
+              </a:spcAft>
+              <a:buNone/>
+            </a:pPr>
+            <a:r>
+              <a:rPr lang="en-US" sz="1200" dirty="0">
+                <a:solidFill>
+                  <a:srgbClr val="2C2C2C"/>
+                </a:solidFill>
+                <a:latin typeface="Verdana" pitchFamily="34" charset="0"/>
+                <a:ea typeface="Verdana" pitchFamily="34" charset="-122"/>
+                <a:cs typeface="Verdana" pitchFamily="34" charset="-120"/>
+              </a:rPr>
+              <a:t> Use only 1–5 cards. Friends will be larger but the count is shorter.</a:t>
+            </a:r>
+            <a:endParaRPr lang="en-US" sz="1200" dirty="0"/>
+          </a:p>
+        </p:txBody>
+      </p:sp>
+      <p:sp>
+        <p:nvSpPr>
+          <p:cNvPr id="5" name="Text 3"/>
+          <p:cNvSpPr/>
+          <p:nvPr/>
+        </p:nvSpPr>
+        <p:spPr>
+          <a:xfrm>
+            <a:off x="406301" y="4434929"/>
+            <a:ext cx="8498026" cy="213271"/>
+          </a:xfrm>
+          <a:prstGeom prst="rect">
+            <a:avLst/>
+          </a:prstGeom>
+          <a:noFill/>
+          <a:ln/>
+        </p:spPr>
+        <p:txBody>
+          <a:bodyPr wrap="square" lIns="0" tIns="0" rIns="0" bIns="0" rtlCol="0" anchor="t"/>
+          <a:lstStyle/>
+          <a:p>
+            <a:pPr algn="l" indent="0" marL="0">
+              <a:lnSpc>
+                <a:spcPts val="1680"/>
+              </a:lnSpc>
+              <a:spcBef>
+                <a:spcPts val="300"/>
+              </a:spcBef>
+              <a:spcAft>
+                <a:spcPts val="300"/>
+              </a:spcAft>
+              <a:buNone/>
+            </a:pPr>
+            <a:r>
+              <a:rPr lang="en-US" sz="1200" dirty="0">
+                <a:solidFill>
+                  <a:srgbClr val="2C2C2C"/>
+                </a:solidFill>
+                <a:latin typeface="Verdana" pitchFamily="34" charset="0"/>
+                <a:ea typeface="Verdana" pitchFamily="34" charset="-122"/>
+                <a:cs typeface="Verdana" pitchFamily="34" charset="-120"/>
+              </a:rPr>
+              <a:t>Primary ·  · IKS Curriculum</a:t>
+            </a:r>
+            <a:endParaRPr lang="en-US" sz="1200" dirty="0"/>
+          </a:p>
+        </p:txBody>
+      </p:sp>
+    </p:spTree>
+  </p:cSld>
+  <p:clrMapOvr>
+    <a:masterClrMapping/>
+  </p:clrMapOvr>
+</p:sld>
+</file>
+
+<file path=ppt/slides/slide13.xml><?xml version="1.0" encoding="utf-8"?>
+<p:sld xmlns:a="http://schemas.openxmlformats.org/drawingml/2006/main" xmlns:r="http://schemas.openxmlformats.org/officeDocument/2006/relationships" xmlns:p="http://schemas.openxmlformats.org/presentationml/2006/main">
+  <p:cSld name="Slide 13">
+    <p:bg>
+      <p:bgPr>
+        <a:solidFill>
+          <a:srgbClr val="FAF7F2"/>
+        </a:solidFill>
+      </p:bgPr>
+    </p:bg>
+    <p:spTree>
+      <p:nvGrpSpPr>
+        <p:cNvPr id="1" name=""/>
+        <p:cNvGrpSpPr/>
+        <p:nvPr/>
+      </p:nvGrpSpPr>
+      <p:grpSpPr>
+        <a:xfrm>
+          <a:off x="0" y="0"/>
+          <a:ext cx="0" cy="0"/>
+          <a:chOff x="0" y="0"/>
+          <a:chExt cx="0" cy="0"/>
+        </a:xfrm>
+      </p:grpSpPr>
+      <p:sp>
+        <p:nvSpPr>
+          <p:cNvPr id="2" name="Text 0"/>
+          <p:cNvSpPr/>
+          <p:nvPr/>
+        </p:nvSpPr>
+        <p:spPr>
+          <a:xfrm>
+            <a:off x="0" y="0"/>
+            <a:ext cx="9144000" cy="101501"/>
+          </a:xfrm>
+          <a:prstGeom prst="rect">
+            <a:avLst/>
+          </a:prstGeom>
+          <a:solidFill>
+            <a:srgbClr val="87A96B"/>
+          </a:solidFill>
+          <a:ln/>
+        </p:spPr>
+        <p:txBody>
+          <a:bodyPr wrap="square" rtlCol="0" anchor="ctr"/>
+          <a:lstStyle/>
+          <a:p>
+            <a:pPr indent="0" marL="0">
+              <a:buNone/>
+            </a:pPr>
+            <a:endParaRPr lang="en-US" dirty="0"/>
+          </a:p>
+        </p:txBody>
+      </p:sp>
+      <p:sp>
+        <p:nvSpPr>
+          <p:cNvPr id="3" name="Text 1"/>
+          <p:cNvSpPr/>
+          <p:nvPr/>
+        </p:nvSpPr>
+        <p:spPr>
+          <a:xfrm>
+            <a:off x="406301" y="457051"/>
+            <a:ext cx="8498026" cy="274290"/>
+          </a:xfrm>
+          <a:prstGeom prst="rect">
+            <a:avLst/>
+          </a:prstGeom>
+          <a:noFill/>
+          <a:ln/>
+        </p:spPr>
+        <p:txBody>
+          <a:bodyPr wrap="square" lIns="0" tIns="0" rIns="0" bIns="0" rtlCol="0" anchor="t"/>
+          <a:lstStyle/>
+          <a:p>
+            <a:pPr algn="l" indent="0" marL="0">
+              <a:lnSpc>
+                <a:spcPts val="2160"/>
+              </a:lnSpc>
+              <a:spcBef>
+                <a:spcPts val="600"/>
+              </a:spcBef>
+              <a:spcAft>
+                <a:spcPts val="800"/>
+              </a:spcAft>
+              <a:buNone/>
+            </a:pPr>
+            <a:r>
+              <a:rPr lang="en-US" sz="1800" b="1" dirty="0">
+                <a:solidFill>
+                  <a:srgbClr val="E07A5F"/>
+                </a:solidFill>
+                <a:latin typeface="Georgia" pitchFamily="34" charset="0"/>
+                <a:ea typeface="Georgia" pitchFamily="34" charset="-122"/>
+                <a:cs typeface="Georgia" pitchFamily="34" charset="-120"/>
+              </a:rPr>
+              <a:t>Teacher's quick notes</a:t>
+            </a:r>
+            <a:endParaRPr lang="en-US" sz="1800" dirty="0"/>
+          </a:p>
+        </p:txBody>
+      </p:sp>
+      <p:sp>
+        <p:nvSpPr>
+          <p:cNvPr id="4" name="Text 2"/>
+          <p:cNvSpPr/>
+          <p:nvPr/>
+        </p:nvSpPr>
+        <p:spPr>
+          <a:xfrm>
+            <a:off x="634901" y="883593"/>
+            <a:ext cx="8102798" cy="769441"/>
+          </a:xfrm>
+          <a:prstGeom prst="rect">
+            <a:avLst/>
+          </a:prstGeom>
+          <a:noFill/>
+          <a:ln/>
+        </p:spPr>
+        <p:txBody>
+          <a:bodyPr wrap="square" lIns="0" tIns="0" rIns="0" bIns="0" rtlCol="0" anchor="t"/>
+          <a:lstStyle/>
+          <a:p>
+            <a:pPr algn="l" marL="342900" indent="-342900">
+              <a:lnSpc>
+                <a:spcPts val="1620"/>
+              </a:lnSpc>
+              <a:spcAft>
+                <a:spcPts val="300"/>
+              </a:spcAft>
+              <a:buSzPct val="100000"/>
+              <a:buChar char="•"/>
+            </a:pPr>
+            <a:r>
+              <a:rPr lang="en-US" sz="1200" dirty="0">
+                <a:solidFill>
+                  <a:srgbClr val="2C2C2C"/>
+                </a:solidFill>
+                <a:latin typeface="Verdana" pitchFamily="34" charset="0"/>
+                <a:ea typeface="Verdana" pitchFamily="34" charset="-122"/>
+                <a:cs typeface="Verdana" pitchFamily="34" charset="-120"/>
+              </a:rPr>
+              <a:t>The HUG metaphor is sticky for this age group. Hold it.</a:t>
+            </a:r>
+            <a:endParaRPr lang="en-US" sz="1200" dirty="0"/>
+          </a:p>
+          <a:p>
+            <a:pPr algn="l" marL="342900" indent="-342900">
+              <a:lnSpc>
+                <a:spcPts val="1620"/>
+              </a:lnSpc>
+              <a:spcAft>
+                <a:spcPts val="300"/>
+              </a:spcAft>
+              <a:buSzPct val="100000"/>
+              <a:buChar char="•"/>
+            </a:pPr>
+            <a:r>
+              <a:rPr lang="en-US" sz="1200" dirty="0">
+                <a:solidFill>
+                  <a:srgbClr val="2C2C2C"/>
+                </a:solidFill>
+                <a:latin typeface="Verdana" pitchFamily="34" charset="0"/>
+                <a:ea typeface="Verdana" pitchFamily="34" charset="-122"/>
+                <a:cs typeface="Verdana" pitchFamily="34" charset="-120"/>
+              </a:rPr>
+              <a:t>Some children laugh at "5 and 5 are best friends." Let them. The laugh helps the math stick.</a:t>
+            </a:r>
+            <a:endParaRPr lang="en-US" sz="1200" dirty="0"/>
+          </a:p>
+          <a:p>
+            <a:pPr algn="l" marL="342900" indent="-342900">
+              <a:lnSpc>
+                <a:spcPts val="1620"/>
+              </a:lnSpc>
+              <a:spcAft>
+                <a:spcPts val="300"/>
+              </a:spcAft>
+              <a:buSzPct val="100000"/>
+              <a:buChar char="•"/>
+            </a:pPr>
+            <a:r>
+              <a:rPr lang="en-US" sz="1200" dirty="0">
+                <a:solidFill>
+                  <a:srgbClr val="2C2C2C"/>
+                </a:solidFill>
+                <a:latin typeface="Verdana" pitchFamily="34" charset="0"/>
+                <a:ea typeface="Verdana" pitchFamily="34" charset="-122"/>
+                <a:cs typeface="Verdana" pitchFamily="34" charset="-120"/>
+              </a:rPr>
+              <a:t>Avoid timed competition between pairs publicly. Each pair races itself.</a:t>
             </a:r>
             <a:endParaRPr lang="en-US" sz="1200" dirty="0"/>
           </a:p>
@@ -2322,7 +3263,7 @@
                 <a:ea typeface="Georgia" pitchFamily="34" charset="-122"/>
                 <a:cs typeface="Georgia" pitchFamily="34" charset="-120"/>
               </a:rPr>
-              <a:t>Materials</a:t>
+              <a:t>Goal</a:t>
             </a:r>
             <a:endParaRPr lang="en-US" sz="1800" dirty="0"/>
           </a:p>
@@ -2370,7 +3311,7 @@
                 <a:ea typeface="Verdana" pitchFamily="34" charset="-122"/>
                 <a:cs typeface="Verdana" pitchFamily="34" charset="-120"/>
               </a:rPr>
-              <a:t>– Number cards 0–9 (one set per pair) – Stopwatch (optional)</a:t>
+              <a:t>Children practise friend recall in a paired drill until every child can name a friend in under 2 seconds.</a:t>
             </a:r>
             <a:endParaRPr lang="en-US" sz="1200" dirty="0"/>
           </a:p>
@@ -2528,7 +3469,7 @@
                 <a:ea typeface="Georgia" pitchFamily="34" charset="-122"/>
                 <a:cs typeface="Georgia" pitchFamily="34" charset="-120"/>
               </a:rPr>
-              <a:t>The flow</a:t>
+              <a:t>Materials</a:t>
             </a:r>
             <a:endParaRPr lang="en-US" sz="1800" dirty="0"/>
           </a:p>
@@ -2537,6 +3478,76 @@
       <p:sp>
         <p:nvSpPr>
           <p:cNvPr id="4" name="Text 2"/>
+          <p:cNvSpPr/>
+          <p:nvPr/>
+        </p:nvSpPr>
+        <p:spPr>
+          <a:xfrm>
+            <a:off x="634901" y="883593"/>
+            <a:ext cx="8102798" cy="525661"/>
+          </a:xfrm>
+          <a:prstGeom prst="rect">
+            <a:avLst/>
+          </a:prstGeom>
+          <a:noFill/>
+          <a:ln/>
+        </p:spPr>
+        <p:txBody>
+          <a:bodyPr wrap="square" lIns="0" tIns="0" rIns="0" bIns="0" rtlCol="0" anchor="t"/>
+          <a:lstStyle/>
+          <a:p>
+            <a:pPr algn="l" marL="342900" indent="-342900">
+              <a:lnSpc>
+                <a:spcPts val="1620"/>
+              </a:lnSpc>
+              <a:spcAft>
+                <a:spcPts val="300"/>
+              </a:spcAft>
+              <a:buSzPct val="100000"/>
+              <a:buChar char="•"/>
+            </a:pPr>
+            <a:r>
+              <a:rPr lang="en-US" sz="1200" dirty="0">
+                <a:solidFill>
+                  <a:srgbClr val="2C2C2C"/>
+                </a:solidFill>
+                <a:latin typeface="Verdana" pitchFamily="34" charset="0"/>
+                <a:ea typeface="Verdana" pitchFamily="34" charset="-122"/>
+                <a:cs typeface="Verdana" pitchFamily="34" charset="-120"/>
+              </a:rPr>
+              <a:t>Number cards 0–9 (one set per pair)</a:t>
+            </a:r>
+            <a:endParaRPr lang="en-US" sz="1200" dirty="0"/>
+          </a:p>
+          <a:p>
+            <a:pPr algn="l" marL="342900" indent="-342900">
+              <a:lnSpc>
+                <a:spcPts val="1620"/>
+              </a:lnSpc>
+              <a:spcAft>
+                <a:spcPts val="300"/>
+              </a:spcAft>
+              <a:buSzPct val="100000"/>
+              <a:buChar char="•"/>
+            </a:pPr>
+            <a:r>
+              <a:rPr lang="en-US" sz="1200" dirty="0">
+                <a:solidFill>
+                  <a:srgbClr val="2C2C2C"/>
+                </a:solidFill>
+                <a:latin typeface="Verdana" pitchFamily="34" charset="0"/>
+                <a:ea typeface="Verdana" pitchFamily="34" charset="-122"/>
+                <a:cs typeface="Verdana" pitchFamily="34" charset="-120"/>
+              </a:rPr>
+              <a:t>Stopwatch (optional)</a:t>
+            </a:r>
+            <a:endParaRPr lang="en-US" sz="1200" dirty="0"/>
+          </a:p>
+        </p:txBody>
+      </p:sp>
+      <p:sp>
+        <p:nvSpPr>
+          <p:cNvPr id="5" name="Text 3"/>
           <p:cNvSpPr/>
           <p:nvPr/>
         </p:nvSpPr>
@@ -2686,7 +3697,7 @@
                 <a:ea typeface="Georgia" pitchFamily="34" charset="-122"/>
                 <a:cs typeface="Georgia" pitchFamily="34" charset="-120"/>
               </a:rPr>
-              <a:t>Settle + chant (5 min)</a:t>
+              <a:t>The flow</a:t>
             </a:r>
             <a:endParaRPr lang="en-US" sz="1800" dirty="0"/>
           </a:p>
@@ -2695,54 +3706,6 @@
       <p:sp>
         <p:nvSpPr>
           <p:cNvPr id="4" name="Text 2"/>
-          <p:cNvSpPr/>
-          <p:nvPr/>
-        </p:nvSpPr>
-        <p:spPr>
-          <a:xfrm>
-            <a:off x="406301" y="870942"/>
-            <a:ext cx="8498026" cy="213271"/>
-          </a:xfrm>
-          <a:prstGeom prst="rect">
-            <a:avLst/>
-          </a:prstGeom>
-          <a:noFill/>
-          <a:ln/>
-        </p:spPr>
-        <p:txBody>
-          <a:bodyPr wrap="square" lIns="0" tIns="0" rIns="0" bIns="0" rtlCol="0" anchor="t"/>
-          <a:lstStyle/>
-          <a:p>
-            <a:pPr algn="l" indent="0" marL="0">
-              <a:lnSpc>
-                <a:spcPts val="1680"/>
-              </a:lnSpc>
-              <a:spcBef>
-                <a:spcPts val="300"/>
-              </a:spcBef>
-              <a:spcAft>
-                <a:spcPts val="300"/>
-              </a:spcAft>
-              <a:buNone/>
-            </a:pPr>
-            <a:r>
-              <a:rPr lang="en-US" sz="1200" dirty="0">
-                <a:solidFill>
-                  <a:srgbClr val="2C2C2C"/>
-                </a:solidFill>
-                <a:latin typeface="Verdana" pitchFamily="34" charset="0"/>
-                <a:ea typeface="Verdana" pitchFamily="34" charset="-122"/>
-                <a:cs typeface="Verdana" pitchFamily="34" charset="-120"/>
-              </a:rPr>
-              <a:t>The friends-to-ten chant, 3 times.</a:t>
-            </a:r>
-            <a:endParaRPr lang="en-US" sz="1200" dirty="0"/>
-          </a:p>
-        </p:txBody>
-      </p:sp>
-      <p:sp>
-        <p:nvSpPr>
-          <p:cNvPr id="5" name="Text 3"/>
           <p:cNvSpPr/>
           <p:nvPr/>
         </p:nvSpPr>
@@ -2892,7 +3855,7 @@
                 <a:ea typeface="Georgia" pitchFamily="34" charset="-122"/>
                 <a:cs typeface="Georgia" pitchFamily="34" charset="-120"/>
               </a:rPr>
-              <a:t>Story-warm-up (3 min)</a:t>
+              <a:t>Settle + chant (5 min)</a:t>
             </a:r>
             <a:endParaRPr lang="en-US" sz="1800" dirty="0"/>
           </a:p>
@@ -2906,109 +3869,8 @@
         </p:nvSpPr>
         <p:spPr>
           <a:xfrm>
-            <a:off x="406301" y="883593"/>
-            <a:ext cx="8331398" cy="842963"/>
-          </a:xfrm>
-          <a:prstGeom prst="rect">
-            <a:avLst/>
-          </a:prstGeom>
-          <a:solidFill>
-            <a:srgbClr val="FFFFFF"/>
-          </a:solidFill>
-          <a:ln/>
-        </p:spPr>
-        <p:txBody>
-          <a:bodyPr wrap="square" rtlCol="0" anchor="ctr"/>
-          <a:lstStyle/>
-          <a:p>
-            <a:pPr indent="0" marL="0">
-              <a:buNone/>
-            </a:pPr>
-            <a:endParaRPr lang="en-US" dirty="0"/>
-          </a:p>
-        </p:txBody>
-      </p:sp>
-      <p:sp>
-        <p:nvSpPr>
-          <p:cNvPr id="5" name="Shape 3"/>
-          <p:cNvSpPr/>
-          <p:nvPr/>
-        </p:nvSpPr>
-        <p:spPr>
-          <a:xfrm>
-            <a:off x="434876" y="883593"/>
-            <a:ext cx="0" cy="842963"/>
-          </a:xfrm>
-          <a:prstGeom prst="line">
-            <a:avLst/>
-          </a:prstGeom>
-          <a:noFill/>
-          <a:ln w="57150">
-            <a:solidFill>
-              <a:srgbClr val="E07A5F"/>
-            </a:solidFill>
-            <a:prstDash val="solid"/>
-          </a:ln>
-        </p:spPr>
-      </p:sp>
-      <p:sp>
-        <p:nvSpPr>
-          <p:cNvPr id="6" name="Text 4"/>
-          <p:cNvSpPr/>
-          <p:nvPr/>
-        </p:nvSpPr>
-        <p:spPr>
-          <a:xfrm>
-            <a:off x="692051" y="1074093"/>
-            <a:ext cx="7973389" cy="461963"/>
-          </a:xfrm>
-          <a:prstGeom prst="rect">
-            <a:avLst/>
-          </a:prstGeom>
-          <a:noFill/>
-          <a:ln/>
-        </p:spPr>
-        <p:txBody>
-          <a:bodyPr wrap="square" lIns="0" tIns="0" rIns="0" bIns="0" rtlCol="0" anchor="t"/>
-          <a:lstStyle/>
-          <a:p>
-            <a:pPr algn="l" indent="0" marL="0">
-              <a:lnSpc>
-                <a:spcPts val="1820"/>
-              </a:lnSpc>
-              <a:spcBef>
-                <a:spcPts val="300"/>
-              </a:spcBef>
-              <a:spcAft>
-                <a:spcPts val="300"/>
-              </a:spcAft>
-              <a:buNone/>
-            </a:pPr>
-            <a:r>
-              <a:rPr lang="en-US" sz="1300" i="1" dirty="0">
-                <a:solidFill>
-                  <a:srgbClr val="2C2C2C"/>
-                </a:solidFill>
-                <a:latin typeface="Georgia" pitchFamily="34" charset="0"/>
-                <a:ea typeface="Georgia" pitchFamily="34" charset="-122"/>
-                <a:cs typeface="Georgia" pitchFamily="34" charset="-120"/>
-              </a:rPr>
-              <a:t>"Yesterday we met the friends. Today they want to HUG. When two friends meet, they hug and become TEN."</a:t>
-            </a:r>
-            <a:endParaRPr lang="en-US" sz="1300" dirty="0"/>
-          </a:p>
-        </p:txBody>
-      </p:sp>
-      <p:sp>
-        <p:nvSpPr>
-          <p:cNvPr id="7" name="Text 5"/>
-          <p:cNvSpPr/>
-          <p:nvPr/>
-        </p:nvSpPr>
-        <p:spPr>
-          <a:xfrm>
-            <a:off x="406301" y="1815405"/>
-            <a:ext cx="8498026" cy="426541"/>
+            <a:off x="406301" y="870942"/>
+            <a:ext cx="8498026" cy="213271"/>
           </a:xfrm>
           <a:prstGeom prst="rect">
             <a:avLst/>
@@ -3041,76 +3903,7 @@
                 <a:ea typeface="Verdana" pitchFamily="34" charset="-122"/>
                 <a:cs typeface="Verdana" pitchFamily="34" charset="-120"/>
               </a:rPr>
-              <a:t>Demonstrate: hold up a "3" card. Pause. </a:t>
-            </a:r>
-            <a:pPr algn="l" indent="0" marL="0">
-              <a:lnSpc>
-                <a:spcPts val="1680"/>
-              </a:lnSpc>
-              <a:spcBef>
-                <a:spcPts val="300"/>
-              </a:spcBef>
-              <a:spcAft>
-                <a:spcPts val="300"/>
-              </a:spcAft>
-              <a:buNone/>
-            </a:pPr>
-            <a:r>
-              <a:rPr lang="en-US" sz="1200" i="1" dirty="0">
-                <a:solidFill>
-                  <a:srgbClr val="2C2C2C"/>
-                </a:solidFill>
-                <a:latin typeface="Verdana" pitchFamily="34" charset="0"/>
-                <a:ea typeface="Verdana" pitchFamily="34" charset="-122"/>
-                <a:cs typeface="Verdana" pitchFamily="34" charset="-120"/>
-              </a:rPr>
-              <a:t>"Who's 3's friend?"</a:t>
-            </a:r>
-            <a:pPr algn="l" indent="0" marL="0">
-              <a:lnSpc>
-                <a:spcPts val="1680"/>
-              </a:lnSpc>
-              <a:spcBef>
-                <a:spcPts val="300"/>
-              </a:spcBef>
-              <a:spcAft>
-                <a:spcPts val="300"/>
-              </a:spcAft>
-              <a:buNone/>
-            </a:pPr>
-            <a:r>
-              <a:rPr lang="en-US" sz="1200" dirty="0">
-                <a:solidFill>
-                  <a:srgbClr val="2C2C2C"/>
-                </a:solidFill>
-                <a:latin typeface="Verdana" pitchFamily="34" charset="0"/>
-                <a:ea typeface="Verdana" pitchFamily="34" charset="-122"/>
-                <a:cs typeface="Verdana" pitchFamily="34" charset="-120"/>
-              </a:rPr>
-              <a:t> Children chorus: SEVEN! Bring out a "7" card. Hug them together. </a:t>
-            </a:r>
-            <a:pPr algn="l" indent="0" marL="0">
-              <a:lnSpc>
-                <a:spcPts val="1680"/>
-              </a:lnSpc>
-              <a:spcBef>
-                <a:spcPts val="300"/>
-              </a:spcBef>
-              <a:spcAft>
-                <a:spcPts val="300"/>
-              </a:spcAft>
-              <a:buNone/>
-            </a:pPr>
-            <a:r>
-              <a:rPr lang="en-US" sz="1200" i="1" dirty="0">
-                <a:solidFill>
-                  <a:srgbClr val="2C2C2C"/>
-                </a:solidFill>
-                <a:latin typeface="Verdana" pitchFamily="34" charset="0"/>
-                <a:ea typeface="Verdana" pitchFamily="34" charset="-122"/>
-                <a:cs typeface="Verdana" pitchFamily="34" charset="-120"/>
-              </a:rPr>
-              <a:t>"Now they're TEN."</a:t>
+              <a:t>The friends-to-ten chant, 3 times.</a:t>
             </a:r>
             <a:endParaRPr lang="en-US" sz="1200" dirty="0"/>
           </a:p>
@@ -3118,7 +3911,7 @@
       </p:sp>
       <p:sp>
         <p:nvSpPr>
-          <p:cNvPr id="8" name="Text 6"/>
+          <p:cNvPr id="5" name="Text 3"/>
           <p:cNvSpPr/>
           <p:nvPr/>
         </p:nvSpPr>
@@ -3268,7 +4061,7 @@
                 <a:ea typeface="Georgia" pitchFamily="34" charset="-122"/>
                 <a:cs typeface="Georgia" pitchFamily="34" charset="-120"/>
               </a:rPr>
-              <a:t>Paired drill (20 min)</a:t>
+              <a:t>Story-warm-up (3 min)</a:t>
             </a:r>
             <a:endParaRPr lang="en-US" sz="1800" dirty="0"/>
           </a:p>
@@ -3282,8 +4075,61 @@
         </p:nvSpPr>
         <p:spPr>
           <a:xfrm>
-            <a:off x="406301" y="870942"/>
-            <a:ext cx="8498026" cy="426541"/>
+            <a:off x="406301" y="883593"/>
+            <a:ext cx="8331398" cy="842963"/>
+          </a:xfrm>
+          <a:prstGeom prst="rect">
+            <a:avLst/>
+          </a:prstGeom>
+          <a:solidFill>
+            <a:srgbClr val="FFFFFF"/>
+          </a:solidFill>
+          <a:ln/>
+        </p:spPr>
+        <p:txBody>
+          <a:bodyPr wrap="square" rtlCol="0" anchor="ctr"/>
+          <a:lstStyle/>
+          <a:p>
+            <a:pPr indent="0" marL="0">
+              <a:buNone/>
+            </a:pPr>
+            <a:endParaRPr lang="en-US" dirty="0"/>
+          </a:p>
+        </p:txBody>
+      </p:sp>
+      <p:sp>
+        <p:nvSpPr>
+          <p:cNvPr id="5" name="Shape 3"/>
+          <p:cNvSpPr/>
+          <p:nvPr/>
+        </p:nvSpPr>
+        <p:spPr>
+          <a:xfrm>
+            <a:off x="434876" y="883593"/>
+            <a:ext cx="0" cy="842963"/>
+          </a:xfrm>
+          <a:prstGeom prst="line">
+            <a:avLst/>
+          </a:prstGeom>
+          <a:noFill/>
+          <a:ln w="57150">
+            <a:solidFill>
+              <a:srgbClr val="E07A5F"/>
+            </a:solidFill>
+            <a:prstDash val="solid"/>
+          </a:ln>
+        </p:spPr>
+      </p:sp>
+      <p:sp>
+        <p:nvSpPr>
+          <p:cNvPr id="6" name="Text 4"/>
+          <p:cNvSpPr/>
+          <p:nvPr/>
+        </p:nvSpPr>
+        <p:spPr>
+          <a:xfrm>
+            <a:off x="692051" y="1074093"/>
+            <a:ext cx="7973389" cy="461963"/>
           </a:xfrm>
           <a:prstGeom prst="rect">
             <a:avLst/>
@@ -3297,6 +4143,54 @@
           <a:p>
             <a:pPr algn="l" indent="0" marL="0">
               <a:lnSpc>
+                <a:spcPts val="1820"/>
+              </a:lnSpc>
+              <a:spcBef>
+                <a:spcPts val="300"/>
+              </a:spcBef>
+              <a:spcAft>
+                <a:spcPts val="300"/>
+              </a:spcAft>
+              <a:buNone/>
+            </a:pPr>
+            <a:r>
+              <a:rPr lang="en-US" sz="1300" i="1" dirty="0">
+                <a:solidFill>
+                  <a:srgbClr val="2C2C2C"/>
+                </a:solidFill>
+                <a:latin typeface="Georgia" pitchFamily="34" charset="0"/>
+                <a:ea typeface="Georgia" pitchFamily="34" charset="-122"/>
+                <a:cs typeface="Georgia" pitchFamily="34" charset="-120"/>
+              </a:rPr>
+              <a:t>"Yesterday we met the friends. Today they want to HUG. When two friends meet, they hug and become TEN."</a:t>
+            </a:r>
+            <a:endParaRPr lang="en-US" sz="1300" dirty="0"/>
+          </a:p>
+        </p:txBody>
+      </p:sp>
+      <p:sp>
+        <p:nvSpPr>
+          <p:cNvPr id="7" name="Text 5"/>
+          <p:cNvSpPr/>
+          <p:nvPr/>
+        </p:nvSpPr>
+        <p:spPr>
+          <a:xfrm>
+            <a:off x="406301" y="1815405"/>
+            <a:ext cx="8498026" cy="426541"/>
+          </a:xfrm>
+          <a:prstGeom prst="rect">
+            <a:avLst/>
+          </a:prstGeom>
+          <a:noFill/>
+          <a:ln/>
+        </p:spPr>
+        <p:txBody>
+          <a:bodyPr wrap="square" lIns="0" tIns="0" rIns="0" bIns="0" rtlCol="0" anchor="t"/>
+          <a:lstStyle/>
+          <a:p>
+            <a:pPr algn="l" indent="0" marL="0">
+              <a:lnSpc>
                 <a:spcPts val="1680"/>
               </a:lnSpc>
               <a:spcBef>
@@ -3308,7 +4202,7 @@
               <a:buNone/>
             </a:pPr>
             <a:r>
-              <a:rPr lang="en-US" sz="1200" b="1" dirty="0">
+              <a:rPr lang="en-US" sz="1200" dirty="0">
                 <a:solidFill>
                   <a:srgbClr val="2C2C2C"/>
                 </a:solidFill>
@@ -3316,7 +4210,7 @@
                 <a:ea typeface="Verdana" pitchFamily="34" charset="-122"/>
                 <a:cs typeface="Verdana" pitchFamily="34" charset="-120"/>
               </a:rPr>
-              <a:t>Round 1 — Quick recall (8 min):</a:t>
+              <a:t>Demonstrate: hold up a "3" card. Pause. </a:t>
             </a:r>
             <a:pPr algn="l" indent="0" marL="0">
               <a:lnSpc>
@@ -3331,7 +4225,7 @@
               <a:buNone/>
             </a:pPr>
             <a:r>
-              <a:rPr lang="en-US" sz="1200" dirty="0">
+              <a:rPr lang="en-US" sz="1200" i="1" dirty="0">
                 <a:solidFill>
                   <a:srgbClr val="2C2C2C"/>
                 </a:solidFill>
@@ -3339,33 +4233,8 @@
                 <a:ea typeface="Verdana" pitchFamily="34" charset="-122"/>
                 <a:cs typeface="Verdana" pitchFamily="34" charset="-120"/>
               </a:rPr>
-              <a:t> – One child holds the deck. Flips card. – Other child names the friend. – Stack hits / misses in two piles. – Swap roles after 30 seconds. – Goal: 10 right in a row.</a:t>
-            </a:r>
-            <a:endParaRPr lang="en-US" sz="1200" dirty="0"/>
-          </a:p>
-        </p:txBody>
-      </p:sp>
-      <p:sp>
-        <p:nvSpPr>
-          <p:cNvPr id="5" name="Text 3"/>
-          <p:cNvSpPr/>
-          <p:nvPr/>
-        </p:nvSpPr>
-        <p:spPr>
-          <a:xfrm>
-            <a:off x="406301" y="1373684"/>
-            <a:ext cx="8498026" cy="213271"/>
-          </a:xfrm>
-          <a:prstGeom prst="rect">
-            <a:avLst/>
-          </a:prstGeom>
-          <a:noFill/>
-          <a:ln/>
-        </p:spPr>
-        <p:txBody>
-          <a:bodyPr wrap="square" lIns="0" tIns="0" rIns="0" bIns="0" rtlCol="0" anchor="t"/>
-          <a:lstStyle/>
-          <a:p>
+              <a:t>"Who's 3's friend?"</a:t>
+            </a:r>
             <a:pPr algn="l" indent="0" marL="0">
               <a:lnSpc>
                 <a:spcPts val="1680"/>
@@ -3379,7 +4248,7 @@
               <a:buNone/>
             </a:pPr>
             <a:r>
-              <a:rPr lang="en-US" sz="1200" b="1" dirty="0">
+              <a:rPr lang="en-US" sz="1200" dirty="0">
                 <a:solidFill>
                   <a:srgbClr val="2C2C2C"/>
                 </a:solidFill>
@@ -3387,7 +4256,7 @@
                 <a:ea typeface="Verdana" pitchFamily="34" charset="-122"/>
                 <a:cs typeface="Verdana" pitchFamily="34" charset="-120"/>
               </a:rPr>
-              <a:t>Round 2 — Speed (5 min):</a:t>
+              <a:t> Children chorus: SEVEN! Bring out a "7" card. Hug them together. </a:t>
             </a:r>
             <a:pPr algn="l" indent="0" marL="0">
               <a:lnSpc>
@@ -3402,7 +4271,7 @@
               <a:buNone/>
             </a:pPr>
             <a:r>
-              <a:rPr lang="en-US" sz="1200" dirty="0">
+              <a:rPr lang="en-US" sz="1200" i="1" dirty="0">
                 <a:solidFill>
                   <a:srgbClr val="2C2C2C"/>
                 </a:solidFill>
@@ -3410,124 +4279,7 @@
                 <a:ea typeface="Verdana" pitchFamily="34" charset="-122"/>
                 <a:cs typeface="Verdana" pitchFamily="34" charset="-120"/>
               </a:rPr>
-              <a:t> – Time how many friends you can name in 30 seconds. – Both children try.</a:t>
-            </a:r>
-            <a:endParaRPr lang="en-US" sz="1200" dirty="0"/>
-          </a:p>
-        </p:txBody>
-      </p:sp>
-      <p:sp>
-        <p:nvSpPr>
-          <p:cNvPr id="6" name="Text 4"/>
-          <p:cNvSpPr/>
-          <p:nvPr/>
-        </p:nvSpPr>
-        <p:spPr>
-          <a:xfrm>
-            <a:off x="406301" y="1663154"/>
-            <a:ext cx="8498026" cy="639812"/>
-          </a:xfrm>
-          <a:prstGeom prst="rect">
-            <a:avLst/>
-          </a:prstGeom>
-          <a:noFill/>
-          <a:ln/>
-        </p:spPr>
-        <p:txBody>
-          <a:bodyPr wrap="square" lIns="0" tIns="0" rIns="0" bIns="0" rtlCol="0" anchor="t"/>
-          <a:lstStyle/>
-          <a:p>
-            <a:pPr algn="l" indent="0" marL="0">
-              <a:lnSpc>
-                <a:spcPts val="1680"/>
-              </a:lnSpc>
-              <a:spcBef>
-                <a:spcPts val="300"/>
-              </a:spcBef>
-              <a:spcAft>
-                <a:spcPts val="300"/>
-              </a:spcAft>
-              <a:buNone/>
-            </a:pPr>
-            <a:r>
-              <a:rPr lang="en-US" sz="1200" b="1" dirty="0">
-                <a:solidFill>
-                  <a:srgbClr val="2C2C2C"/>
-                </a:solidFill>
-                <a:latin typeface="Verdana" pitchFamily="34" charset="0"/>
-                <a:ea typeface="Verdana" pitchFamily="34" charset="-122"/>
-                <a:cs typeface="Verdana" pitchFamily="34" charset="-120"/>
-              </a:rPr>
-              <a:t>Round 3 — Hide the friend (7 min):</a:t>
-            </a:r>
-            <a:pPr algn="l" indent="0" marL="0">
-              <a:lnSpc>
-                <a:spcPts val="1680"/>
-              </a:lnSpc>
-              <a:spcBef>
-                <a:spcPts val="300"/>
-              </a:spcBef>
-              <a:spcAft>
-                <a:spcPts val="300"/>
-              </a:spcAft>
-              <a:buNone/>
-            </a:pPr>
-            <a:r>
-              <a:rPr lang="en-US" sz="1200" dirty="0">
-                <a:solidFill>
-                  <a:srgbClr val="2C2C2C"/>
-                </a:solidFill>
-                <a:latin typeface="Verdana" pitchFamily="34" charset="0"/>
-                <a:ea typeface="Verdana" pitchFamily="34" charset="-122"/>
-                <a:cs typeface="Verdana" pitchFamily="34" charset="-120"/>
-              </a:rPr>
-              <a:t> – Lay 5 cards face-up. Hide one (turn over). – Partner has to GUESS the hidden card based only on its friend. – E.g., visible cards are 1, 3, 5, 7, 9; sum should be 25. Actual sum visible = ? Difference tells you the hidden card.</a:t>
-            </a:r>
-            <a:endParaRPr lang="en-US" sz="1200" dirty="0"/>
-          </a:p>
-        </p:txBody>
-      </p:sp>
-      <p:sp>
-        <p:nvSpPr>
-          <p:cNvPr id="7" name="Text 5"/>
-          <p:cNvSpPr/>
-          <p:nvPr/>
-        </p:nvSpPr>
-        <p:spPr>
-          <a:xfrm>
-            <a:off x="634901" y="2391817"/>
-            <a:ext cx="8102798" cy="281880"/>
-          </a:xfrm>
-          <a:prstGeom prst="rect">
-            <a:avLst/>
-          </a:prstGeom>
-          <a:noFill/>
-          <a:ln/>
-        </p:spPr>
-        <p:txBody>
-          <a:bodyPr wrap="square" lIns="0" tIns="0" rIns="0" bIns="0" rtlCol="0" anchor="t"/>
-          <a:lstStyle/>
-          <a:p>
-            <a:pPr algn="l" marL="342900" indent="-342900">
-              <a:lnSpc>
-                <a:spcPts val="1620"/>
-              </a:lnSpc>
-              <a:spcAft>
-                <a:spcPts val="300"/>
-              </a:spcAft>
-              <a:buSzPct val="100000"/>
-              <a:buChar char="•"/>
-            </a:pPr>
-            <a:r>
-              <a:rPr lang="en-US" sz="1200" dirty="0">
-                <a:solidFill>
-                  <a:srgbClr val="2C2C2C"/>
-                </a:solidFill>
-                <a:latin typeface="Verdana" pitchFamily="34" charset="0"/>
-                <a:ea typeface="Verdana" pitchFamily="34" charset="-122"/>
-                <a:cs typeface="Verdana" pitchFamily="34" charset="-120"/>
-              </a:rPr>
-              <a:t>(For Grade 3, simplify: just show one card's friend; partner names what's hidden.)</a:t>
+              <a:t>"Now they're TEN."</a:t>
             </a:r>
             <a:endParaRPr lang="en-US" sz="1200" dirty="0"/>
           </a:p>
@@ -3685,7 +4437,7 @@
                 <a:ea typeface="Georgia" pitchFamily="34" charset="-122"/>
                 <a:cs typeface="Georgia" pitchFamily="34" charset="-120"/>
               </a:rPr>
-              <a:t>Wrap-up (7 min)</a:t>
+              <a:t>Paired drill (20 min)</a:t>
             </a:r>
             <a:endParaRPr lang="en-US" sz="1800" dirty="0"/>
           </a:p>
@@ -3700,7 +4452,7 @@
         <p:spPr>
           <a:xfrm>
             <a:off x="406301" y="870942"/>
-            <a:ext cx="8498026" cy="426541"/>
+            <a:ext cx="8498026" cy="213271"/>
           </a:xfrm>
           <a:prstGeom prst="rect">
             <a:avLst/>
@@ -3725,7 +4477,7 @@
               <a:buNone/>
             </a:pPr>
             <a:r>
-              <a:rPr lang="en-US" sz="1200" dirty="0">
+              <a:rPr lang="en-US" sz="1200" b="1" dirty="0">
                 <a:solidFill>
                   <a:srgbClr val="2C2C2C"/>
                 </a:solidFill>
@@ -3733,7 +4485,7 @@
                 <a:ea typeface="Verdana" pitchFamily="34" charset="-122"/>
                 <a:cs typeface="Verdana" pitchFamily="34" charset="-120"/>
               </a:rPr>
-              <a:t>– Quick chorus: teacher calls a digit; class chorus the friend. Do 15 in 60 seconds. – 4 → SIX! 8 → TWO! 1 → NINE! 6 → FOUR! 2 → EIGHT! 5 → FIVE! ... – Daily chant.</a:t>
+              <a:t>Round 1 — Quick recall (8 min):</a:t>
             </a:r>
             <a:endParaRPr lang="en-US" sz="1200" dirty="0"/>
           </a:p>
@@ -3742,6 +4494,148 @@
       <p:sp>
         <p:nvSpPr>
           <p:cNvPr id="5" name="Text 3"/>
+          <p:cNvSpPr/>
+          <p:nvPr/>
+        </p:nvSpPr>
+        <p:spPr>
+          <a:xfrm>
+            <a:off x="634901" y="1173063"/>
+            <a:ext cx="8102798" cy="1257002"/>
+          </a:xfrm>
+          <a:prstGeom prst="rect">
+            <a:avLst/>
+          </a:prstGeom>
+          <a:noFill/>
+          <a:ln/>
+        </p:spPr>
+        <p:txBody>
+          <a:bodyPr wrap="square" lIns="0" tIns="0" rIns="0" bIns="0" rtlCol="0" anchor="t"/>
+          <a:lstStyle/>
+          <a:p>
+            <a:pPr algn="l" marL="342900" indent="-342900">
+              <a:lnSpc>
+                <a:spcPts val="1620"/>
+              </a:lnSpc>
+              <a:spcAft>
+                <a:spcPts val="300"/>
+              </a:spcAft>
+              <a:buSzPct val="100000"/>
+              <a:buChar char="•"/>
+            </a:pPr>
+            <a:r>
+              <a:rPr lang="en-US" sz="1200" dirty="0">
+                <a:solidFill>
+                  <a:srgbClr val="2C2C2C"/>
+                </a:solidFill>
+                <a:latin typeface="Verdana" pitchFamily="34" charset="0"/>
+                <a:ea typeface="Verdana" pitchFamily="34" charset="-122"/>
+                <a:cs typeface="Verdana" pitchFamily="34" charset="-120"/>
+              </a:rPr>
+              <a:t>One child holds the deck. Flips card.</a:t>
+            </a:r>
+            <a:endParaRPr lang="en-US" sz="1200" dirty="0"/>
+          </a:p>
+          <a:p>
+            <a:pPr algn="l" marL="342900" indent="-342900">
+              <a:lnSpc>
+                <a:spcPts val="1620"/>
+              </a:lnSpc>
+              <a:spcAft>
+                <a:spcPts val="300"/>
+              </a:spcAft>
+              <a:buSzPct val="100000"/>
+              <a:buChar char="•"/>
+            </a:pPr>
+            <a:r>
+              <a:rPr lang="en-US" sz="1200" dirty="0">
+                <a:solidFill>
+                  <a:srgbClr val="2C2C2C"/>
+                </a:solidFill>
+                <a:latin typeface="Verdana" pitchFamily="34" charset="0"/>
+                <a:ea typeface="Verdana" pitchFamily="34" charset="-122"/>
+                <a:cs typeface="Verdana" pitchFamily="34" charset="-120"/>
+              </a:rPr>
+              <a:t>Other child names the friend.</a:t>
+            </a:r>
+            <a:endParaRPr lang="en-US" sz="1200" dirty="0"/>
+          </a:p>
+          <a:p>
+            <a:pPr algn="l" marL="342900" indent="-342900">
+              <a:lnSpc>
+                <a:spcPts val="1620"/>
+              </a:lnSpc>
+              <a:spcAft>
+                <a:spcPts val="300"/>
+              </a:spcAft>
+              <a:buSzPct val="100000"/>
+              <a:buChar char="•"/>
+            </a:pPr>
+            <a:r>
+              <a:rPr lang="en-US" sz="1200" dirty="0">
+                <a:solidFill>
+                  <a:srgbClr val="2C2C2C"/>
+                </a:solidFill>
+                <a:latin typeface="Verdana" pitchFamily="34" charset="0"/>
+                <a:ea typeface="Verdana" pitchFamily="34" charset="-122"/>
+                <a:cs typeface="Verdana" pitchFamily="34" charset="-120"/>
+              </a:rPr>
+              <a:t>Stack hits / misses in two piles.</a:t>
+            </a:r>
+            <a:endParaRPr lang="en-US" sz="1200" dirty="0"/>
+          </a:p>
+          <a:p>
+            <a:pPr algn="l" marL="342900" indent="-342900">
+              <a:lnSpc>
+                <a:spcPts val="1620"/>
+              </a:lnSpc>
+              <a:spcAft>
+                <a:spcPts val="300"/>
+              </a:spcAft>
+              <a:buSzPct val="100000"/>
+              <a:buChar char="•"/>
+            </a:pPr>
+            <a:r>
+              <a:rPr lang="en-US" sz="1200" dirty="0">
+                <a:solidFill>
+                  <a:srgbClr val="2C2C2C"/>
+                </a:solidFill>
+                <a:latin typeface="Verdana" pitchFamily="34" charset="0"/>
+                <a:ea typeface="Verdana" pitchFamily="34" charset="-122"/>
+                <a:cs typeface="Verdana" pitchFamily="34" charset="-120"/>
+              </a:rPr>
+              <a:t>Swap roles after 30 seconds.</a:t>
+            </a:r>
+            <a:endParaRPr lang="en-US" sz="1200" dirty="0"/>
+          </a:p>
+          <a:p>
+            <a:pPr algn="l" marL="342900" indent="-342900">
+              <a:lnSpc>
+                <a:spcPts val="1620"/>
+              </a:lnSpc>
+              <a:spcAft>
+                <a:spcPts val="300"/>
+              </a:spcAft>
+              <a:buSzPct val="100000"/>
+              <a:buChar char="•"/>
+            </a:pPr>
+            <a:r>
+              <a:rPr lang="en-US" sz="1200" dirty="0">
+                <a:solidFill>
+                  <a:srgbClr val="2C2C2C"/>
+                </a:solidFill>
+                <a:latin typeface="Verdana" pitchFamily="34" charset="0"/>
+                <a:ea typeface="Verdana" pitchFamily="34" charset="-122"/>
+                <a:cs typeface="Verdana" pitchFamily="34" charset="-120"/>
+              </a:rPr>
+              <a:t>Goal: 10 right in a row.</a:t>
+            </a:r>
+            <a:endParaRPr lang="en-US" sz="1200" dirty="0"/>
+          </a:p>
+        </p:txBody>
+      </p:sp>
+      <p:sp>
+        <p:nvSpPr>
+          <p:cNvPr id="6" name="Text 4"/>
           <p:cNvSpPr/>
           <p:nvPr/>
         </p:nvSpPr>
@@ -3891,7 +4785,7 @@
                 <a:ea typeface="Georgia" pitchFamily="34" charset="-122"/>
                 <a:cs typeface="Georgia" pitchFamily="34" charset="-120"/>
               </a:rPr>
-              <a:t>Homework / take-home</a:t>
+              <a:t>Paired drill (20 min) (cont.)</a:t>
             </a:r>
             <a:endParaRPr lang="en-US" sz="1800" dirty="0"/>
           </a:p>
@@ -3931,7 +4825,7 @@
               <a:buNone/>
             </a:pPr>
             <a:r>
-              <a:rPr lang="en-US" sz="1200" dirty="0">
+              <a:rPr lang="en-US" sz="1200" b="1" dirty="0">
                 <a:solidFill>
                   <a:srgbClr val="2C2C2C"/>
                 </a:solidFill>
@@ -3939,7 +4833,7 @@
                 <a:ea typeface="Verdana" pitchFamily="34" charset="-122"/>
                 <a:cs typeface="Verdana" pitchFamily="34" charset="-120"/>
               </a:rPr>
-              <a:t>– Friend drill with family: 20 digits in 60 seconds. Track how many you got.</a:t>
+              <a:t>Round 2 — Speed (5 min):</a:t>
             </a:r>
             <a:endParaRPr lang="en-US" sz="1200" dirty="0"/>
           </a:p>
@@ -3948,6 +4842,76 @@
       <p:sp>
         <p:nvSpPr>
           <p:cNvPr id="5" name="Text 3"/>
+          <p:cNvSpPr/>
+          <p:nvPr/>
+        </p:nvSpPr>
+        <p:spPr>
+          <a:xfrm>
+            <a:off x="634901" y="1173063"/>
+            <a:ext cx="8102798" cy="525661"/>
+          </a:xfrm>
+          <a:prstGeom prst="rect">
+            <a:avLst/>
+          </a:prstGeom>
+          <a:noFill/>
+          <a:ln/>
+        </p:spPr>
+        <p:txBody>
+          <a:bodyPr wrap="square" lIns="0" tIns="0" rIns="0" bIns="0" rtlCol="0" anchor="t"/>
+          <a:lstStyle/>
+          <a:p>
+            <a:pPr algn="l" marL="342900" indent="-342900">
+              <a:lnSpc>
+                <a:spcPts val="1620"/>
+              </a:lnSpc>
+              <a:spcAft>
+                <a:spcPts val="300"/>
+              </a:spcAft>
+              <a:buSzPct val="100000"/>
+              <a:buChar char="•"/>
+            </a:pPr>
+            <a:r>
+              <a:rPr lang="en-US" sz="1200" dirty="0">
+                <a:solidFill>
+                  <a:srgbClr val="2C2C2C"/>
+                </a:solidFill>
+                <a:latin typeface="Verdana" pitchFamily="34" charset="0"/>
+                <a:ea typeface="Verdana" pitchFamily="34" charset="-122"/>
+                <a:cs typeface="Verdana" pitchFamily="34" charset="-120"/>
+              </a:rPr>
+              <a:t>Time how many friends you can name in 30 seconds.</a:t>
+            </a:r>
+            <a:endParaRPr lang="en-US" sz="1200" dirty="0"/>
+          </a:p>
+          <a:p>
+            <a:pPr algn="l" marL="342900" indent="-342900">
+              <a:lnSpc>
+                <a:spcPts val="1620"/>
+              </a:lnSpc>
+              <a:spcAft>
+                <a:spcPts val="300"/>
+              </a:spcAft>
+              <a:buSzPct val="100000"/>
+              <a:buChar char="•"/>
+            </a:pPr>
+            <a:r>
+              <a:rPr lang="en-US" sz="1200" dirty="0">
+                <a:solidFill>
+                  <a:srgbClr val="2C2C2C"/>
+                </a:solidFill>
+                <a:latin typeface="Verdana" pitchFamily="34" charset="0"/>
+                <a:ea typeface="Verdana" pitchFamily="34" charset="-122"/>
+                <a:cs typeface="Verdana" pitchFamily="34" charset="-120"/>
+              </a:rPr>
+              <a:t>Both children try.</a:t>
+            </a:r>
+            <a:endParaRPr lang="en-US" sz="1200" dirty="0"/>
+          </a:p>
+        </p:txBody>
+      </p:sp>
+      <p:sp>
+        <p:nvSpPr>
+          <p:cNvPr id="6" name="Text 4"/>
           <p:cNvSpPr/>
           <p:nvPr/>
         </p:nvSpPr>
@@ -4097,7 +5061,7 @@
                 <a:ea typeface="Georgia" pitchFamily="34" charset="-122"/>
                 <a:cs typeface="Georgia" pitchFamily="34" charset="-120"/>
               </a:rPr>
-              <a:t>Differentiation</a:t>
+              <a:t>Paired drill (20 min) (cont.)</a:t>
             </a:r>
             <a:endParaRPr lang="en-US" sz="1800" dirty="0"/>
           </a:p>
@@ -4111,8 +5075,8 @@
         </p:nvSpPr>
         <p:spPr>
           <a:xfrm>
-            <a:off x="634901" y="883593"/>
-            <a:ext cx="8102798" cy="525661"/>
+            <a:off x="406301" y="870942"/>
+            <a:ext cx="8498026" cy="213271"/>
           </a:xfrm>
           <a:prstGeom prst="rect">
             <a:avLst/>
@@ -4124,15 +5088,17 @@
           <a:bodyPr wrap="square" lIns="0" tIns="0" rIns="0" bIns="0" rtlCol="0" anchor="t"/>
           <a:lstStyle/>
           <a:p>
-            <a:pPr algn="l" marL="342900" indent="-342900">
-              <a:lnSpc>
-                <a:spcPts val="1620"/>
-              </a:lnSpc>
-              <a:spcAft>
-                <a:spcPts val="300"/>
-              </a:spcAft>
-              <a:buSzPct val="100000"/>
-              <a:buChar char="•"/>
+            <a:pPr algn="l" indent="0" marL="0">
+              <a:lnSpc>
+                <a:spcPts val="1680"/>
+              </a:lnSpc>
+              <a:spcBef>
+                <a:spcPts val="300"/>
+              </a:spcBef>
+              <a:spcAft>
+                <a:spcPts val="300"/>
+              </a:spcAft>
+              <a:buNone/>
             </a:pPr>
             <a:r>
               <a:rPr lang="en-US" sz="1200" b="1" dirty="0">
@@ -4143,16 +5109,42 @@
                 <a:ea typeface="Verdana" pitchFamily="34" charset="-122"/>
                 <a:cs typeface="Verdana" pitchFamily="34" charset="-120"/>
               </a:rPr>
-              <a:t>Tier up:</a:t>
-            </a:r>
-            <a:pPr algn="l" indent="0" marL="0">
+              <a:t>Round 3 — Hide the friend (7 min):</a:t>
+            </a:r>
+            <a:endParaRPr lang="en-US" sz="1200" dirty="0"/>
+          </a:p>
+        </p:txBody>
+      </p:sp>
+      <p:sp>
+        <p:nvSpPr>
+          <p:cNvPr id="5" name="Text 3"/>
+          <p:cNvSpPr/>
+          <p:nvPr/>
+        </p:nvSpPr>
+        <p:spPr>
+          <a:xfrm>
+            <a:off x="634901" y="1173063"/>
+            <a:ext cx="8102798" cy="1218902"/>
+          </a:xfrm>
+          <a:prstGeom prst="rect">
+            <a:avLst/>
+          </a:prstGeom>
+          <a:noFill/>
+          <a:ln/>
+        </p:spPr>
+        <p:txBody>
+          <a:bodyPr wrap="square" lIns="0" tIns="0" rIns="0" bIns="0" rtlCol="0" anchor="t"/>
+          <a:lstStyle/>
+          <a:p>
+            <a:pPr algn="l" marL="342900" indent="-342900">
               <a:lnSpc>
                 <a:spcPts val="1620"/>
               </a:lnSpc>
               <a:spcAft>
                 <a:spcPts val="300"/>
               </a:spcAft>
-              <a:buNone/>
+              <a:buSzPct val="100000"/>
+              <a:buChar char="•"/>
             </a:pPr>
             <a:r>
               <a:rPr lang="en-US" sz="1200" dirty="0">
@@ -4163,7 +5155,7 @@
                 <a:ea typeface="Verdana" pitchFamily="34" charset="-122"/>
                 <a:cs typeface="Verdana" pitchFamily="34" charset="-120"/>
               </a:rPr>
-              <a:t> "Friends to 100" preview: who completes 73? (27.) Show the friend on bar paper.</a:t>
+              <a:t>Lay 5 cards face-up. Hide one (turn over).</a:t>
             </a:r>
             <a:endParaRPr lang="en-US" sz="1200" dirty="0"/>
           </a:p>
@@ -4179,7 +5171,7 @@
               <a:buChar char="•"/>
             </a:pPr>
             <a:r>
-              <a:rPr lang="en-US" sz="1200" b="1" dirty="0">
+              <a:rPr lang="en-US" sz="1200" dirty="0">
                 <a:solidFill>
                   <a:srgbClr val="2C2C2C"/>
                 </a:solidFill>
@@ -4187,16 +5179,20 @@
                 <a:ea typeface="Verdana" pitchFamily="34" charset="-122"/>
                 <a:cs typeface="Verdana" pitchFamily="34" charset="-120"/>
               </a:rPr>
-              <a:t>Tier down:</a:t>
-            </a:r>
-            <a:pPr algn="l" indent="0" marL="0">
+              <a:t>Partner has to GUESS the hidden card based only on its friend.</a:t>
+            </a:r>
+            <a:endParaRPr lang="en-US" sz="1200" dirty="0"/>
+          </a:p>
+          <a:p>
+            <a:pPr algn="l" marL="342900" indent="-342900">
               <a:lnSpc>
                 <a:spcPts val="1620"/>
               </a:lnSpc>
               <a:spcAft>
                 <a:spcPts val="300"/>
               </a:spcAft>
-              <a:buNone/>
+              <a:buSzPct val="100000"/>
+              <a:buChar char="•"/>
             </a:pPr>
             <a:r>
               <a:rPr lang="en-US" sz="1200" dirty="0">
@@ -4207,15 +5203,39 @@
                 <a:ea typeface="Verdana" pitchFamily="34" charset="-122"/>
                 <a:cs typeface="Verdana" pitchFamily="34" charset="-120"/>
               </a:rPr>
-              <a:t> Use only 1–5 cards. Friends will be larger but the count is shorter.</a:t>
+              <a:t>E.g., visible cards are 1, 3, 5, 7, 9; sum should be 25. Actual sum visible = ? Difference tells you the hidden card.</a:t>
             </a:r>
             <a:endParaRPr lang="en-US" sz="1200" dirty="0"/>
           </a:p>
-        </p:txBody>
-      </p:sp>
-      <p:sp>
-        <p:nvSpPr>
-          <p:cNvPr id="5" name="Text 3"/>
+          <a:p>
+            <a:pPr algn="l" marL="342900" indent="-342900">
+              <a:lnSpc>
+                <a:spcPts val="1620"/>
+              </a:lnSpc>
+              <a:spcAft>
+                <a:spcPts val="300"/>
+              </a:spcAft>
+              <a:buSzPct val="100000"/>
+              <a:buChar char="•"/>
+            </a:pPr>
+            <a:r>
+              <a:rPr lang="en-US" sz="1200" dirty="0">
+                <a:solidFill>
+                  <a:srgbClr val="2C2C2C"/>
+                </a:solidFill>
+                <a:latin typeface="Verdana" pitchFamily="34" charset="0"/>
+                <a:ea typeface="Verdana" pitchFamily="34" charset="-122"/>
+                <a:cs typeface="Verdana" pitchFamily="34" charset="-120"/>
+              </a:rPr>
+              <a:t>(For Grade 3, simplify: just show one card's friend; partner names what's hidden.)</a:t>
+            </a:r>
+            <a:endParaRPr lang="en-US" sz="1200" dirty="0"/>
+          </a:p>
+        </p:txBody>
+      </p:sp>
+      <p:sp>
+        <p:nvSpPr>
+          <p:cNvPr id="6" name="Text 4"/>
           <p:cNvSpPr/>
           <p:nvPr/>
         </p:nvSpPr>
